--- a/course/automation-lab-deck.pptx
+++ b/course/automation-lab-deck.pptx
@@ -4462,7 +4462,7 @@
                 <a:ea typeface="Geist Mono" pitchFamily="34" charset="-122"/>
                 <a:cs typeface="Geist Mono" pitchFamily="34" charset="-120"/>
               </a:rPr>
-              <a:t>Easy to game by sharing code, hard to game by guessing — copy whatever you like, you still have to read the page.</a:t>
+              <a:t>Copy any code you like. You still have to read the page.</a:t>
             </a:r>
             <a:endParaRPr lang="en-US" sz="1200" dirty="0"/>
           </a:p>
@@ -10064,7 +10064,7 @@
                 <a:ea typeface="Geist Mono" pitchFamily="34" charset="-122"/>
                 <a:cs typeface="Geist Mono" pitchFamily="34" charset="-120"/>
               </a:rPr>
-              <a:t>— Bonus</a:t>
+              <a:t>— BONUS</a:t>
             </a:r>
             <a:r>
               <a:rPr lang="en-US" sz="1250" spc="200" kern="0" dirty="0" b="0">
@@ -11877,29 +11877,6 @@
         <p:spPr>
           <a:xfrm>
             <a:off x="841248" y="5532120"/>
-            <a:ext cx="10509199" cy="0"/>
-          </a:xfrm>
-          <a:prstGeom prst="line">
-            <a:avLst/>
-          </a:prstGeom>
-          <a:noFill/>
-          <a:ln w="9525">
-            <a:solidFill>
-              <a:srgbClr val="2C2D34"/>
-            </a:solidFill>
-            <a:prstDash val="solid"/>
-          </a:ln>
-        </p:spPr>
-      </p:sp>
-      <p:sp>
-        <p:nvSpPr>
-          <p:cNvPr id="27" name="Shape 25"/>
-          <p:cNvSpPr/>
-          <p:nvPr/>
-        </p:nvSpPr>
-        <p:spPr>
-          <a:xfrm>
-            <a:off x="841248" y="6080760"/>
             <a:ext cx="10509199" cy="0"/>
           </a:xfrm>
           <a:prstGeom prst="line">

--- a/course/automation-lab-deck.pptx
+++ b/course/automation-lab-deck.pptx
@@ -10359,7 +10359,7 @@
                 <a:ea typeface="Geist" pitchFamily="34" charset="-122"/>
                 <a:cs typeface="Geist" pitchFamily="34" charset="-120"/>
               </a:rPr>
-              <a:t>Al-Nahda</a:t>
+              <a:t>The company</a:t>
             </a:r>
             <a:r>
               <a:rPr lang="en-US" sz="1550" dirty="0" b="0">
@@ -10370,7 +10370,7 @@
                 <a:ea typeface="Geist" pitchFamily="34" charset="-122"/>
                 <a:cs typeface="Geist" pitchFamily="34" charset="-120"/>
               </a:rPr>
-              <a:t xml:space="preserve">  — the company, and the paper trail it leaves behind.</a:t>
+              <a:t xml:space="preserve">  — how it buys, and the paper trail it leaves behind.</a:t>
             </a:r>
             <a:endParaRPr lang="en-US" sz="1550" dirty="0"/>
           </a:p>
